--- a/docs/CloudPulse-AI_Capstone-Overview.pptx
+++ b/docs/CloudPulse-AI_Capstone-Overview.pptx
@@ -9,6 +9,7 @@
     <p:sldId id="257" r:id="rId3"/>
     <p:sldId id="258" r:id="rId4"/>
     <p:sldId id="259" r:id="rId5"/>
+    <p:sldId id="260" r:id="rId11"/>
   </p:sldIdLst>
   <p:notesMasterIdLst>
     <p:notesMasterId r:id="rId6"/>
@@ -1253,7 +1254,7 @@
                 <a:ea typeface="Arial" pitchFamily="34" charset="-122"/>
                 <a:cs typeface="Arial" pitchFamily="34" charset="-120"/>
               </a:rPr>
-              <a:t>Intelligent Cloud Governance, Cost &amp; Compliance Platform — serverless on AWS, insights by Amazon Bedrock</a:t>
+              <a:t>AWS-Native Cloud Governance, Cost &amp; Compliance Platform — serverless on AWS, grounded AI insights on Amazon Bedrock</a:t>
             </a:r>
             <a:endParaRPr lang="en-US" sz="1500" dirty="0"/>
           </a:p>
@@ -1802,7 +1803,7 @@
                 <a:ea typeface="Arial" pitchFamily="34" charset="-122"/>
                 <a:cs typeface="Arial" pitchFamily="34" charset="-120"/>
               </a:rPr>
-              <a:t>Capstone Project • August 2026</a:t>
+              <a:t>Capstone Project • v2.0, as built • October 2026</a:t>
             </a:r>
             <a:endParaRPr lang="en-US" sz="1100" dirty="0"/>
           </a:p>
@@ -2504,7 +2505,7 @@
                 <a:ea typeface="Arial" pitchFamily="34" charset="-122"/>
                 <a:cs typeface="Arial" pitchFamily="34" charset="-120"/>
               </a:rPr>
-              <a:t>A serverless, AI-assisted governance platform — one pane of glass over the AWS estate, built entirely on AWS serverless services.</a:t>
+              <a:t>A serverless, AI-assisted governance platform — one place to see the AWS estate, built entirely on AWS managed services.</a:t>
             </a:r>
             <a:endParaRPr lang="en-US" sz="1300" dirty="0"/>
           </a:p>
@@ -2634,7 +2635,7 @@
                 <a:ea typeface="Arial" pitchFamily="34" charset="-122"/>
                 <a:cs typeface="Arial" pitchFamily="34" charset="-120"/>
               </a:rPr>
-              <a:t>Automatically inventories resources across accounts and regions, on a daily schedule and on demand.</a:t>
+              <a:t>Inventories every resource across accounts and regions — tagged or not — daily and on demand.</a:t>
             </a:r>
             <a:endParaRPr lang="en-US" sz="1250" dirty="0"/>
           </a:p>
@@ -2764,7 +2765,7 @@
                 <a:ea typeface="Arial" pitchFamily="34" charset="-122"/>
                 <a:cs typeface="Arial" pitchFamily="34" charset="-120"/>
               </a:rPr>
-              <a:t>Checks every resource against organizational tagging standards; rules are data, not code.</a:t>
+              <a:t>Checks every resource against tagging rules stored as data; violations become tracked findings and a compliance score.</a:t>
             </a:r>
             <a:endParaRPr lang="en-US" sz="1250" dirty="0"/>
           </a:p>
@@ -2894,7 +2895,7 @@
                 <a:ea typeface="Arial" pitchFamily="34" charset="-122"/>
                 <a:cs typeface="Arial" pitchFamily="34" charset="-120"/>
               </a:rPr>
-              <a:t>Identifies owners by mining CloudTrail activity and maps resources to internal projects (SDAs).</a:t>
+              <a:t>Traces owners from CloudTrail creation events, with a fallback chain, and maps resources to internal projects (SDAs).</a:t>
             </a:r>
             <a:endParaRPr lang="en-US" sz="1250" dirty="0"/>
           </a:p>
@@ -3024,7 +3025,7 @@
                 <a:ea typeface="Arial" pitchFamily="34" charset="-122"/>
                 <a:cs typeface="Arial" pitchFamily="34" charset="-120"/>
               </a:rPr>
-              <a:t>Notifies and escalates owners on a set cadence; safe fixes (like missing tags) are applied automatically with a full audit trail.</a:t>
+              <a:t>Emails owners on a day-0/2/4 cadence, then escalates; every finding is tracked until resolved, with a full audit trail.</a:t>
             </a:r>
             <a:endParaRPr lang="en-US" sz="1250" dirty="0"/>
           </a:p>
@@ -3154,7 +3155,7 @@
                 <a:ea typeface="Arial" pitchFamily="34" charset="-122"/>
                 <a:cs typeface="Arial" pitchFamily="34" charset="-120"/>
               </a:rPr>
-              <a:t>Per-project budgets, overrun detection, unused-resource and rightsizing recommendations.</a:t>
+              <a:t>Daily spend, per-SDA budgets with overrun findings, idle resources, IAM hygiene, forecasts and rightsizing.</a:t>
             </a:r>
             <a:endParaRPr lang="en-US" sz="1250" dirty="0"/>
           </a:p>
@@ -3284,7 +3285,7 @@
                 <a:ea typeface="Arial" pitchFamily="34" charset="-122"/>
                 <a:cs typeface="Arial" pitchFamily="34" charset="-120"/>
               </a:rPr>
-              <a:t>Amazon Bedrock turns findings into plain-language insights, suggestions, and natural-language Q&amp;A.</a:t>
+              <a:t>Bedrock AgentCore with Amazon Nova 2 Lite writes a daily digest and per-finding suggestions — validated before display.</a:t>
             </a:r>
             <a:endParaRPr lang="en-US" sz="1250" dirty="0"/>
           </a:p>
@@ -3323,7 +3324,7 @@
                 <a:ea typeface="Arial" pitchFamily="34" charset="-122"/>
                 <a:cs typeface="Arial" pitchFamily="34" charset="-120"/>
               </a:rPr>
-              <a:t>Python + FastAPI on Lambda  •  Angular 18  •  Aurora Serverless v2  •  Step Functions  •  roles-only access, zero stored credentials</a:t>
+              <a:t>Python + FastAPI on Lambda  •  Angular 18  •  Aurora Serverless v2  •  Step Functions  •  Terraform  •  zero stored credentials</a:t>
             </a:r>
             <a:endParaRPr lang="en-US" sz="1050" dirty="0"/>
           </a:p>
@@ -3565,7 +3566,7 @@
                 <a:ea typeface="Arial" pitchFamily="34" charset="-122"/>
                 <a:cs typeface="Arial" pitchFamily="34" charset="-120"/>
               </a:rPr>
-              <a:t>Automated multi-region, multi-account inventory replaces manual console checks — the estate is known at all times.</a:t>
+              <a:t>A whole-account inventory across accounts and regions, refreshed daily and on demand, replaces manual console checks.</a:t>
             </a:r>
             <a:endParaRPr lang="en-US" sz="1250" dirty="0"/>
           </a:p>
@@ -3697,7 +3698,7 @@
                 <a:ea typeface="Arial" pitchFamily="34" charset="-122"/>
                 <a:cs typeface="Arial" pitchFamily="34" charset="-120"/>
               </a:rPr>
-              <a:t>Every resource gets an owner — from tags, CloudTrail forensics, or a triage queue — and owners are chased until findings are resolved.</a:t>
+              <a:t>Every resource is traced to an owner from CloudTrail, and owners are emailed and escalated until findings are resolved.</a:t>
             </a:r>
             <a:endParaRPr lang="en-US" sz="1250" dirty="0"/>
           </a:p>
@@ -3829,7 +3830,7 @@
                 <a:ea typeface="Arial" pitchFamily="34" charset="-122"/>
                 <a:cs typeface="Arial" pitchFamily="34" charset="-120"/>
               </a:rPr>
-              <a:t>Project-level budgets, overrun alerts, and concrete savings recommendations surface problems before the bill does.</a:t>
+              <a:t>Daily spend, per-SDA budgets with overrun findings, idle-resource detection and rightsizing surface problems before the bill.</a:t>
             </a:r>
             <a:endParaRPr lang="en-US" sz="1250" dirty="0"/>
           </a:p>
@@ -3919,7 +3920,7 @@
                 <a:ea typeface="Arial" pitchFamily="34" charset="-122"/>
                 <a:cs typeface="Arial" pitchFamily="34" charset="-120"/>
               </a:rPr>
-              <a:t>Reduced toil</a:t>
+              <a:t>Less toil, grounded AI</a:t>
             </a:r>
             <a:endParaRPr lang="en-US" sz="1600" dirty="0"/>
           </a:p>
@@ -3961,7 +3962,7 @@
                 <a:ea typeface="Arial" pitchFamily="34" charset="-122"/>
                 <a:cs typeface="Arial" pitchFamily="34" charset="-120"/>
               </a:rPr>
-              <a:t>Safe auto-remediation and AI-generated insights replace hours of manual reporting and follow-up.</a:t>
+              <a:t>A daily digest and a suggestion per finding replace manual reporting — each validated against platform data; people make every change.</a:t>
             </a:r>
             <a:endParaRPr lang="en-US" sz="1250" dirty="0"/>
           </a:p>
@@ -4036,7 +4037,713 @@
                 <a:ea typeface="Arial" pitchFamily="34" charset="-122"/>
                 <a:cs typeface="Arial" pitchFamily="34" charset="-120"/>
               </a:rPr>
-              <a:t>tag-compliance % up   •   mean time-to-remediate down   •   unused-resource spend identified and recovered</a:t>
+              <a:t>tag-compliance % up   •   mean time-to-resolve down   •   idle-resource spend identified</a:t>
+            </a:r>
+            <a:endParaRPr lang="en-US" sz="1400" dirty="0"/>
+          </a:p>
+        </p:txBody>
+      </p:sp>
+    </p:spTree>
+  </p:cSld>
+  <p:clrMapOvr>
+    <a:masterClrMapping/>
+  </p:clrMapOvr>
+</p:sld>
+</file>
+
+<file path=ppt/slides/slide5.xml><?xml version="1.0" encoding="utf-8"?>
+<p:sld xmlns:a="http://schemas.openxmlformats.org/drawingml/2006/main" xmlns:p="http://schemas.openxmlformats.org/presentationml/2006/main" xmlns:r="http://schemas.openxmlformats.org/officeDocument/2006/relationships">
+  <p:cSld>
+    <p:bg>
+      <p:bgPr>
+        <a:solidFill>
+          <a:srgbClr val="FFFFFF"/>
+        </a:solidFill>
+      </p:bgPr>
+    </p:bg>
+    <p:spTree>
+      <p:nvGrpSpPr>
+        <p:cNvPr id="1" name=""/>
+        <p:cNvGrpSpPr/>
+        <p:nvPr/>
+      </p:nvGrpSpPr>
+      <p:grpSpPr/>
+      <p:sp>
+        <p:nvSpPr>
+          <p:cNvPr id="2" name="Text 0"/>
+          <p:cNvSpPr/>
+          <p:nvPr/>
+        </p:nvSpPr>
+        <p:spPr>
+          <a:xfrm>
+            <a:off x="502920" y="274320"/>
+            <a:ext cx="11155680" cy="548640"/>
+          </a:xfrm>
+          <a:prstGeom prst="rect">
+            <a:avLst/>
+          </a:prstGeom>
+          <a:noFill/>
+          <a:ln/>
+        </p:spPr>
+        <p:txBody>
+          <a:bodyPr wrap="square" rtlCol="0" anchor="ctr"/>
+          <a:lstStyle/>
+          <a:p>
+            <a:pPr indent="0" marL="0">
+              <a:buNone/>
+            </a:pPr>
+            <a:r>
+              <a:rPr lang="en-US" sz="3000" b="1" dirty="0">
+                <a:solidFill>
+                  <a:srgbClr val="232F3E"/>
+                </a:solidFill>
+                <a:latin typeface="Arial" pitchFamily="34" charset="0"/>
+                <a:ea typeface="Arial" pitchFamily="34" charset="-122"/>
+                <a:cs typeface="Arial" pitchFamily="34" charset="-120"/>
+              </a:rPr>
+              <a:t>Where It Stands — October 2026</a:t>
+            </a:r>
+            <a:endParaRPr lang="en-US" sz="3000" dirty="0"/>
+          </a:p>
+        </p:txBody>
+      </p:sp>
+      <p:sp>
+        <p:nvSpPr>
+          <p:cNvPr id="3" name="Text 1"/>
+          <p:cNvSpPr/>
+          <p:nvPr/>
+        </p:nvSpPr>
+        <p:spPr>
+          <a:xfrm>
+            <a:off x="512064" y="822960"/>
+            <a:ext cx="11155680" cy="320040"/>
+          </a:xfrm>
+          <a:prstGeom prst="rect">
+            <a:avLst/>
+          </a:prstGeom>
+          <a:noFill/>
+          <a:ln/>
+        </p:spPr>
+        <p:txBody>
+          <a:bodyPr wrap="square" rtlCol="0" anchor="ctr"/>
+          <a:lstStyle/>
+          <a:p>
+            <a:pPr indent="0" marL="0">
+              <a:buNone/>
+            </a:pPr>
+            <a:r>
+              <a:rPr lang="en-US" sz="1300" dirty="0">
+                <a:solidFill>
+                  <a:srgbClr val="5B6673"/>
+                </a:solidFill>
+                <a:latin typeface="Arial" pitchFamily="34" charset="0"/>
+                <a:ea typeface="Arial" pitchFamily="34" charset="-122"/>
+                <a:cs typeface="Arial" pitchFamily="34" charset="-120"/>
+              </a:rPr>
+              <a:t>Built spec-first by one maintainer with Claude Code: six specs, 481 tasks, 149 pull requests.</a:t>
+            </a:r>
+            <a:endParaRPr lang="en-US" sz="1300" dirty="0"/>
+          </a:p>
+        </p:txBody>
+      </p:sp>
+      <p:sp>
+        <p:nvSpPr>
+          <p:cNvPr id="4" name="Shape 2"/>
+          <p:cNvSpPr/>
+          <p:nvPr/>
+        </p:nvSpPr>
+        <p:spPr>
+          <a:xfrm>
+            <a:off x="548640" y="1417320"/>
+            <a:ext cx="5257800" cy="1737360"/>
+          </a:xfrm>
+          <a:prstGeom prst="roundRect">
+            <a:avLst>
+              <a:gd name="adj" fmla="val 4211"/>
+            </a:avLst>
+          </a:prstGeom>
+          <a:solidFill>
+            <a:srgbClr val="EEF4FE"/>
+          </a:solidFill>
+          <a:ln w="12700">
+            <a:solidFill>
+              <a:srgbClr val="C9D2DC"/>
+            </a:solidFill>
+            <a:prstDash val="solid"/>
+          </a:ln>
+        </p:spPr>
+      </p:sp>
+      <p:pic>
+        <p:nvPicPr>
+          <p:cNvPr id="5" name="Image 0" descr="/tmp/aws-icons/dist/ApplicationIntegration/EventBridge.png">    </p:cNvPr>
+          <p:cNvPicPr>
+            <a:picLocks noChangeAspect="1"/>
+          </p:cNvPicPr>
+          <p:nvPr/>
+        </p:nvPicPr>
+        <p:blipFill>
+          <a:blip r:embed="rId2"/>
+          <a:stretch>
+            <a:fillRect/>
+          </a:stretch>
+        </p:blipFill>
+        <p:spPr>
+          <a:xfrm>
+            <a:off x="777240" y="1618488"/>
+            <a:ext cx="457200" cy="457200"/>
+          </a:xfrm>
+          <a:prstGeom prst="rect">
+            <a:avLst/>
+          </a:prstGeom>
+        </p:spPr>
+      </p:pic>
+      <p:sp>
+        <p:nvSpPr>
+          <p:cNvPr id="6" name="Text 3"/>
+          <p:cNvSpPr/>
+          <p:nvPr/>
+        </p:nvSpPr>
+        <p:spPr>
+          <a:xfrm>
+            <a:off x="1417320" y="1618488"/>
+            <a:ext cx="4206240" cy="457200"/>
+          </a:xfrm>
+          <a:prstGeom prst="rect">
+            <a:avLst/>
+          </a:prstGeom>
+          <a:noFill/>
+          <a:ln/>
+        </p:spPr>
+        <p:txBody>
+          <a:bodyPr wrap="square" lIns="0" tIns="0" rIns="0" bIns="0" rtlCol="0" anchor="ctr"/>
+          <a:lstStyle/>
+          <a:p>
+            <a:pPr indent="0" marL="0">
+              <a:buNone/>
+            </a:pPr>
+            <a:r>
+              <a:rPr lang="en-US" sz="1600" b="1" dirty="0">
+                <a:solidFill>
+                  <a:srgbClr val="232F3E"/>
+                </a:solidFill>
+                <a:latin typeface="Arial" pitchFamily="34" charset="0"/>
+                <a:ea typeface="Arial" pitchFamily="34" charset="-122"/>
+                <a:cs typeface="Arial" pitchFamily="34" charset="-120"/>
+              </a:rPr>
+              <a:t>Built</a:t>
+            </a:r>
+            <a:endParaRPr lang="en-US" sz="1600" dirty="0"/>
+          </a:p>
+        </p:txBody>
+      </p:sp>
+      <p:sp>
+        <p:nvSpPr>
+          <p:cNvPr id="7" name="Text 4"/>
+          <p:cNvSpPr/>
+          <p:nvPr/>
+        </p:nvSpPr>
+        <p:spPr>
+          <a:xfrm>
+            <a:off x="777240" y="2194560"/>
+            <a:ext cx="4846320" cy="868680"/>
+          </a:xfrm>
+          <a:prstGeom prst="rect">
+            <a:avLst/>
+          </a:prstGeom>
+          <a:noFill/>
+          <a:ln/>
+        </p:spPr>
+        <p:txBody>
+          <a:bodyPr wrap="square" lIns="0" tIns="0" rIns="0" bIns="0" rtlCol="0" anchor="t"/>
+          <a:lstStyle/>
+          <a:p>
+            <a:pPr indent="0" marL="0">
+              <a:lnSpc>
+                <a:spcPts val="1600"/>
+              </a:lnSpc>
+              <a:buNone/>
+            </a:pPr>
+            <a:r>
+              <a:rPr lang="en-US" sz="1250" dirty="0">
+                <a:solidFill>
+                  <a:srgbClr val="1A2433"/>
+                </a:solidFill>
+                <a:latin typeface="Arial" pitchFamily="34" charset="0"/>
+                <a:ea typeface="Arial" pitchFamily="34" charset="-122"/>
+                <a:cs typeface="Arial" pitchFamily="34" charset="-120"/>
+              </a:rPr>
+              <a:t>All six specs implemented and tested — 481 of 481 tasks closed, behind 16 required CI checks including an AI constitution review.</a:t>
+            </a:r>
+            <a:endParaRPr lang="en-US" sz="1250" dirty="0"/>
+          </a:p>
+        </p:txBody>
+      </p:sp>
+      <p:sp>
+        <p:nvSpPr>
+          <p:cNvPr id="8" name="Shape 5"/>
+          <p:cNvSpPr/>
+          <p:nvPr/>
+        </p:nvSpPr>
+        <p:spPr>
+          <a:xfrm>
+            <a:off x="6355080" y="1417320"/>
+            <a:ext cx="5257800" cy="1737360"/>
+          </a:xfrm>
+          <a:prstGeom prst="roundRect">
+            <a:avLst>
+              <a:gd name="adj" fmla="val 4211"/>
+            </a:avLst>
+          </a:prstGeom>
+          <a:solidFill>
+            <a:srgbClr val="F4F6F9"/>
+          </a:solidFill>
+          <a:ln w="12700">
+            <a:solidFill>
+              <a:srgbClr val="C9D2DC"/>
+            </a:solidFill>
+            <a:prstDash val="solid"/>
+          </a:ln>
+        </p:spPr>
+      </p:sp>
+      <p:pic>
+        <p:nvPicPr>
+          <p:cNvPr id="9" name="Image 1" descr="/tmp/aws-icons/dist/General/User.png">    </p:cNvPr>
+          <p:cNvPicPr>
+            <a:picLocks noChangeAspect="1"/>
+          </p:cNvPicPr>
+          <p:nvPr/>
+        </p:nvPicPr>
+        <p:blipFill>
+          <a:blip r:embed="rId3"/>
+          <a:stretch>
+            <a:fillRect/>
+          </a:stretch>
+        </p:blipFill>
+        <p:spPr>
+          <a:xfrm>
+            <a:off x="6583680" y="1618488"/>
+            <a:ext cx="457200" cy="457200"/>
+          </a:xfrm>
+          <a:prstGeom prst="rect">
+            <a:avLst/>
+          </a:prstGeom>
+        </p:spPr>
+      </p:pic>
+      <p:sp>
+        <p:nvSpPr>
+          <p:cNvPr id="10" name="Text 6"/>
+          <p:cNvSpPr/>
+          <p:nvPr/>
+        </p:nvSpPr>
+        <p:spPr>
+          <a:xfrm>
+            <a:off x="7223760" y="1618488"/>
+            <a:ext cx="4206240" cy="457200"/>
+          </a:xfrm>
+          <a:prstGeom prst="rect">
+            <a:avLst/>
+          </a:prstGeom>
+          <a:noFill/>
+          <a:ln/>
+        </p:spPr>
+        <p:txBody>
+          <a:bodyPr wrap="square" lIns="0" tIns="0" rIns="0" bIns="0" rtlCol="0" anchor="ctr"/>
+          <a:lstStyle/>
+          <a:p>
+            <a:pPr indent="0" marL="0">
+              <a:buNone/>
+            </a:pPr>
+            <a:r>
+              <a:rPr lang="en-US" sz="1600" b="1" dirty="0">
+                <a:solidFill>
+                  <a:srgbClr val="232F3E"/>
+                </a:solidFill>
+                <a:latin typeface="Arial" pitchFamily="34" charset="0"/>
+                <a:ea typeface="Arial" pitchFamily="34" charset="-122"/>
+                <a:cs typeface="Arial" pitchFamily="34" charset="-120"/>
+              </a:rPr>
+              <a:t>Proven live</a:t>
+            </a:r>
+            <a:endParaRPr lang="en-US" sz="1600" dirty="0"/>
+          </a:p>
+        </p:txBody>
+      </p:sp>
+      <p:sp>
+        <p:nvSpPr>
+          <p:cNvPr id="11" name="Text 7"/>
+          <p:cNvSpPr/>
+          <p:nvPr/>
+        </p:nvSpPr>
+        <p:spPr>
+          <a:xfrm>
+            <a:off x="6583680" y="2194560"/>
+            <a:ext cx="4846320" cy="868680"/>
+          </a:xfrm>
+          <a:prstGeom prst="rect">
+            <a:avLst/>
+          </a:prstGeom>
+          <a:noFill/>
+          <a:ln/>
+        </p:spPr>
+        <p:txBody>
+          <a:bodyPr wrap="square" lIns="0" tIns="0" rIns="0" bIns="0" rtlCol="0" anchor="t"/>
+          <a:lstStyle/>
+          <a:p>
+            <a:pPr indent="0" marL="0">
+              <a:lnSpc>
+                <a:spcPts val="1600"/>
+              </a:lnSpc>
+              <a:buNone/>
+            </a:pPr>
+            <a:r>
+              <a:rPr lang="en-US" sz="1250" dirty="0">
+                <a:solidFill>
+                  <a:srgbClr val="1A2433"/>
+                </a:solidFill>
+                <a:latin typeface="Arial" pitchFamily="34" charset="0"/>
+                <a:ea typeface="Arial" pitchFamily="34" charset="-122"/>
+                <a:cs typeface="Arial" pitchFamily="34" charset="-120"/>
+              </a:rPr>
+              <a:t>On a real AWS account: registration, an 87-resource scan, compliance, ownership, the dashboard, the Nova digest and suggestions, cost.</a:t>
+            </a:r>
+            <a:endParaRPr lang="en-US" sz="1250" dirty="0"/>
+          </a:p>
+        </p:txBody>
+      </p:sp>
+      <p:sp>
+        <p:nvSpPr>
+          <p:cNvPr id="12" name="Shape 8"/>
+          <p:cNvSpPr/>
+          <p:nvPr/>
+        </p:nvSpPr>
+        <p:spPr>
+          <a:xfrm>
+            <a:off x="548640" y="3383280"/>
+            <a:ext cx="5257800" cy="1737360"/>
+          </a:xfrm>
+          <a:prstGeom prst="roundRect">
+            <a:avLst>
+              <a:gd name="adj" fmla="val 4211"/>
+            </a:avLst>
+          </a:prstGeom>
+          <a:solidFill>
+            <a:srgbClr val="EEF4FE"/>
+          </a:solidFill>
+          <a:ln w="12700">
+            <a:solidFill>
+              <a:srgbClr val="C9D2DC"/>
+            </a:solidFill>
+            <a:prstDash val="solid"/>
+          </a:ln>
+        </p:spPr>
+      </p:sp>
+      <p:pic>
+        <p:nvPicPr>
+          <p:cNvPr id="13" name="Image 2" descr="/tmp/aws-icons/dist/CloudFinancialManagement/CostExplorer.png">    </p:cNvPr>
+          <p:cNvPicPr>
+            <a:picLocks noChangeAspect="1"/>
+          </p:cNvPicPr>
+          <p:nvPr/>
+        </p:nvPicPr>
+        <p:blipFill>
+          <a:blip r:embed="rId4"/>
+          <a:stretch>
+            <a:fillRect/>
+          </a:stretch>
+        </p:blipFill>
+        <p:spPr>
+          <a:xfrm>
+            <a:off x="777240" y="3584448"/>
+            <a:ext cx="457200" cy="457200"/>
+          </a:xfrm>
+          <a:prstGeom prst="rect">
+            <a:avLst/>
+          </a:prstGeom>
+        </p:spPr>
+      </p:pic>
+      <p:sp>
+        <p:nvSpPr>
+          <p:cNvPr id="14" name="Text 9"/>
+          <p:cNvSpPr/>
+          <p:nvPr/>
+        </p:nvSpPr>
+        <p:spPr>
+          <a:xfrm>
+            <a:off x="1417320" y="3584448"/>
+            <a:ext cx="4206240" cy="457200"/>
+          </a:xfrm>
+          <a:prstGeom prst="rect">
+            <a:avLst/>
+          </a:prstGeom>
+          <a:noFill/>
+          <a:ln/>
+        </p:spPr>
+        <p:txBody>
+          <a:bodyPr wrap="square" lIns="0" tIns="0" rIns="0" bIns="0" rtlCol="0" anchor="ctr"/>
+          <a:lstStyle/>
+          <a:p>
+            <a:pPr indent="0" marL="0">
+              <a:buNone/>
+            </a:pPr>
+            <a:r>
+              <a:rPr lang="en-US" sz="1600" b="1" dirty="0">
+                <a:solidFill>
+                  <a:srgbClr val="232F3E"/>
+                </a:solidFill>
+                <a:latin typeface="Arial" pitchFamily="34" charset="0"/>
+                <a:ea typeface="Arial" pitchFamily="34" charset="-122"/>
+                <a:cs typeface="Arial" pitchFamily="34" charset="-120"/>
+              </a:rPr>
+              <a:t>Found live, fixed</a:t>
+            </a:r>
+            <a:endParaRPr lang="en-US" sz="1600" dirty="0"/>
+          </a:p>
+        </p:txBody>
+      </p:sp>
+      <p:sp>
+        <p:nvSpPr>
+          <p:cNvPr id="15" name="Text 10"/>
+          <p:cNvSpPr/>
+          <p:nvPr/>
+        </p:nvSpPr>
+        <p:spPr>
+          <a:xfrm>
+            <a:off x="777240" y="4160520"/>
+            <a:ext cx="4846320" cy="868680"/>
+          </a:xfrm>
+          <a:prstGeom prst="rect">
+            <a:avLst/>
+          </a:prstGeom>
+          <a:noFill/>
+          <a:ln/>
+        </p:spPr>
+        <p:txBody>
+          <a:bodyPr wrap="square" lIns="0" tIns="0" rIns="0" bIns="0" rtlCol="0" anchor="t"/>
+          <a:lstStyle/>
+          <a:p>
+            <a:pPr indent="0" marL="0">
+              <a:lnSpc>
+                <a:spcPts val="1600"/>
+              </a:lnSpc>
+              <a:buNone/>
+            </a:pPr>
+            <a:r>
+              <a:rPr lang="en-US" sz="1250" dirty="0">
+                <a:solidFill>
+                  <a:srgbClr val="1A2433"/>
+                </a:solidFill>
+                <a:latin typeface="Arial" pitchFamily="34" charset="0"/>
+                <a:ea typeface="Arial" pitchFamily="34" charset="-122"/>
+                <a:cs typeface="Arial" pitchFamily="34" charset="-120"/>
+              </a:rPr>
+              <a:t>Three bugs no mocked test could catch: missing scan permissions, missing enricher grants, and CloudTrail throttling.</a:t>
+            </a:r>
+            <a:endParaRPr lang="en-US" sz="1250" dirty="0"/>
+          </a:p>
+        </p:txBody>
+      </p:sp>
+      <p:sp>
+        <p:nvSpPr>
+          <p:cNvPr id="16" name="Shape 11"/>
+          <p:cNvSpPr/>
+          <p:nvPr/>
+        </p:nvSpPr>
+        <p:spPr>
+          <a:xfrm>
+            <a:off x="6355080" y="3383280"/>
+            <a:ext cx="5257800" cy="1737360"/>
+          </a:xfrm>
+          <a:prstGeom prst="roundRect">
+            <a:avLst>
+              <a:gd name="adj" fmla="val 4211"/>
+            </a:avLst>
+          </a:prstGeom>
+          <a:solidFill>
+            <a:srgbClr val="F4F6F9"/>
+          </a:solidFill>
+          <a:ln w="12700">
+            <a:solidFill>
+              <a:srgbClr val="C9D2DC"/>
+            </a:solidFill>
+            <a:prstDash val="solid"/>
+          </a:ln>
+        </p:spPr>
+      </p:sp>
+      <p:pic>
+        <p:nvPicPr>
+          <p:cNvPr id="17" name="Image 3" descr="/tmp/aws-icons/dist/ArtificialIntelligence/Bedrock.png">    </p:cNvPr>
+          <p:cNvPicPr>
+            <a:picLocks noChangeAspect="1"/>
+          </p:cNvPicPr>
+          <p:nvPr/>
+        </p:nvPicPr>
+        <p:blipFill>
+          <a:blip r:embed="rId5"/>
+          <a:stretch>
+            <a:fillRect/>
+          </a:stretch>
+        </p:blipFill>
+        <p:spPr>
+          <a:xfrm>
+            <a:off x="6583680" y="3584448"/>
+            <a:ext cx="457200" cy="457200"/>
+          </a:xfrm>
+          <a:prstGeom prst="rect">
+            <a:avLst/>
+          </a:prstGeom>
+        </p:spPr>
+      </p:pic>
+      <p:sp>
+        <p:nvSpPr>
+          <p:cNvPr id="18" name="Text 12"/>
+          <p:cNvSpPr/>
+          <p:nvPr/>
+        </p:nvSpPr>
+        <p:spPr>
+          <a:xfrm>
+            <a:off x="7223760" y="3584448"/>
+            <a:ext cx="4206240" cy="457200"/>
+          </a:xfrm>
+          <a:prstGeom prst="rect">
+            <a:avLst/>
+          </a:prstGeom>
+          <a:noFill/>
+          <a:ln/>
+        </p:spPr>
+        <p:txBody>
+          <a:bodyPr wrap="square" lIns="0" tIns="0" rIns="0" bIns="0" rtlCol="0" anchor="ctr"/>
+          <a:lstStyle/>
+          <a:p>
+            <a:pPr indent="0" marL="0">
+              <a:buNone/>
+            </a:pPr>
+            <a:r>
+              <a:rPr lang="en-US" sz="1600" b="1" dirty="0">
+                <a:solidFill>
+                  <a:srgbClr val="232F3E"/>
+                </a:solidFill>
+                <a:latin typeface="Arial" pitchFamily="34" charset="0"/>
+                <a:ea typeface="Arial" pitchFamily="34" charset="-122"/>
+                <a:cs typeface="Arial" pitchFamily="34" charset="-120"/>
+              </a:rPr>
+              <a:t>Still to prove</a:t>
+            </a:r>
+            <a:endParaRPr lang="en-US" sz="1600" dirty="0"/>
+          </a:p>
+        </p:txBody>
+      </p:sp>
+      <p:sp>
+        <p:nvSpPr>
+          <p:cNvPr id="19" name="Text 13"/>
+          <p:cNvSpPr/>
+          <p:nvPr/>
+        </p:nvSpPr>
+        <p:spPr>
+          <a:xfrm>
+            <a:off x="6583680" y="4160520"/>
+            <a:ext cx="4846320" cy="868680"/>
+          </a:xfrm>
+          <a:prstGeom prst="rect">
+            <a:avLst/>
+          </a:prstGeom>
+          <a:noFill/>
+          <a:ln/>
+        </p:spPr>
+        <p:txBody>
+          <a:bodyPr wrap="square" lIns="0" tIns="0" rIns="0" bIns="0" rtlCol="0" anchor="t"/>
+          <a:lstStyle/>
+          <a:p>
+            <a:pPr indent="0" marL="0">
+              <a:lnSpc>
+                <a:spcPts val="1600"/>
+              </a:lnSpc>
+              <a:buNone/>
+            </a:pPr>
+            <a:r>
+              <a:rPr lang="en-US" sz="1250" dirty="0">
+                <a:solidFill>
+                  <a:srgbClr val="1A2433"/>
+                </a:solidFill>
+                <a:latin typeface="Arial" pitchFamily="34" charset="0"/>
+                <a:ea typeface="Arial" pitchFamily="34" charset="-122"/>
+                <a:cs typeface="Arial" pitchFamily="34" charset="-120"/>
+              </a:rPr>
+              <a:t>Owner email (needs a verified SES sender) and cross-account onboarding (needs a second AWS account).</a:t>
+            </a:r>
+            <a:endParaRPr lang="en-US" sz="1250" dirty="0"/>
+          </a:p>
+        </p:txBody>
+      </p:sp>
+      <p:sp>
+        <p:nvSpPr>
+          <p:cNvPr id="20" name="Shape 14"/>
+          <p:cNvSpPr/>
+          <p:nvPr/>
+        </p:nvSpPr>
+        <p:spPr>
+          <a:xfrm>
+            <a:off x="548640" y="5532120"/>
+            <a:ext cx="11064240" cy="868680"/>
+          </a:xfrm>
+          <a:prstGeom prst="roundRect">
+            <a:avLst>
+              <a:gd name="adj" fmla="val 8421"/>
+            </a:avLst>
+          </a:prstGeom>
+          <a:solidFill>
+            <a:srgbClr val="232F3E"/>
+          </a:solidFill>
+          <a:ln/>
+        </p:spPr>
+      </p:sp>
+      <p:sp>
+        <p:nvSpPr>
+          <p:cNvPr id="21" name="Text 15"/>
+          <p:cNvSpPr/>
+          <p:nvPr/>
+        </p:nvSpPr>
+        <p:spPr>
+          <a:xfrm>
+            <a:off x="822960" y="5532120"/>
+            <a:ext cx="10607040" cy="868680"/>
+          </a:xfrm>
+          <a:prstGeom prst="rect">
+            <a:avLst/>
+          </a:prstGeom>
+          <a:noFill/>
+          <a:ln/>
+        </p:spPr>
+        <p:txBody>
+          <a:bodyPr wrap="square" lIns="0" tIns="0" rIns="0" bIns="0" rtlCol="0" anchor="ctr"/>
+          <a:lstStyle/>
+          <a:p>
+            <a:pPr indent="0" marL="0">
+              <a:buNone/>
+            </a:pPr>
+            <a:r>
+              <a:rPr lang="en-US" sz="1400" b="1" dirty="0">
+                <a:solidFill>
+                  <a:srgbClr val="FFC46B"/>
+                </a:solidFill>
+                <a:latin typeface="Arial" pitchFamily="34" charset="0"/>
+                <a:ea typeface="Arial" pitchFamily="34" charset="-122"/>
+                <a:cs typeface="Arial" pitchFamily="34" charset="-120"/>
+              </a:rPr>
+              <a:t>Runs as:  </a:t>
+            </a:r>
+            <a:pPr indent="0" marL="0">
+              <a:buNone/>
+            </a:pPr>
+            <a:r>
+              <a:rPr lang="en-US" sz="1400" dirty="0">
+                <a:solidFill>
+                  <a:srgbClr val="FFFFFF"/>
+                </a:solidFill>
+                <a:latin typeface="Arial" pitchFamily="34" charset="0"/>
+                <a:ea typeface="Arial" pitchFamily="34" charset="-122"/>
+                <a:cs typeface="Arial" pitchFamily="34" charset="-120"/>
+              </a:rPr>
+              <a:t>one environment, deployed per session   •   torn down to zero cost   •   zero stored credentials</a:t>
             </a:r>
             <a:endParaRPr lang="en-US" sz="1400" dirty="0"/>
           </a:p>
